--- a/專題海報.pptx
+++ b/專題海報.pptx
@@ -663,6 +663,34 @@
 <file path=ppt/slideLayouts/slideLayout2.xml><?xml version="1.0" encoding="utf-8"?>
 <p:sldLayout xmlns:a="http://schemas.openxmlformats.org/drawingml/2006/main" xmlns:r="http://schemas.openxmlformats.org/officeDocument/2006/relationships" xmlns:p="http://schemas.openxmlformats.org/presentationml/2006/main" type="obj" preserve="1">
   <p:cSld name="Title and Content">
+    <p:bg>
+      <p:bgPr>
+        <a:gradFill>
+          <a:gsLst>
+            <a:gs pos="0">
+              <a:srgbClr val="86A6B0"/>
+            </a:gs>
+            <a:gs pos="40000">
+              <a:schemeClr val="bg2">
+                <a:tint val="45000"/>
+                <a:shade val="99000"/>
+                <a:satMod val="350000"/>
+              </a:schemeClr>
+            </a:gs>
+            <a:gs pos="100000">
+              <a:schemeClr val="bg2">
+                <a:shade val="20000"/>
+                <a:satMod val="255000"/>
+              </a:schemeClr>
+            </a:gs>
+          </a:gsLst>
+          <a:path path="circle">
+            <a:fillToRect l="50000" t="-80000" r="50000" b="180000"/>
+          </a:path>
+        </a:gradFill>
+        <a:effectLst/>
+      </p:bgPr>
+    </p:bg>
     <p:spTree>
       <p:nvGrpSpPr>
         <p:cNvPr id="1" name=""/>
@@ -725,7 +753,7 @@
             </a:lvl1pPr>
           </a:lstStyle>
           <a:p>
-            <a:endParaRPr/>
+            <a:endParaRPr dirty="0"/>
           </a:p>
         </p:txBody>
       </p:sp>
@@ -826,7 +854,7 @@
     </p:spTree>
   </p:cSld>
   <p:clrMapOvr>
-    <a:masterClrMapping/>
+    <a:overrideClrMapping bg1="dk1" tx1="lt1" bg2="dk2" tx2="lt2" accent1="accent1" accent2="accent2" accent3="accent3" accent4="accent4" accent5="accent5" accent6="accent6" hlink="hlink" folHlink="folHlink"/>
   </p:clrMapOvr>
 </p:sldLayout>
 </file>
@@ -1318,7 +1346,7 @@
     <p:bg>
       <p:bgPr>
         <a:solidFill>
-          <a:schemeClr val="bg1"/>
+          <a:srgbClr val="F9F6F0"/>
         </a:solidFill>
         <a:effectLst/>
       </p:bgPr>
@@ -1345,7 +1373,7 @@
         </p:nvSpPr>
         <p:spPr>
           <a:xfrm>
-            <a:off x="0" y="0"/>
+            <a:off x="-8698" y="0"/>
             <a:ext cx="14191615" cy="20104100"/>
           </a:xfrm>
           <a:custGeom>
@@ -1376,14 +1404,14 @@
             </a:pathLst>
           </a:custGeom>
           <a:solidFill>
-            <a:srgbClr val="214556"/>
+            <a:srgbClr val="D2C4B4"/>
           </a:solidFill>
         </p:spPr>
         <p:txBody>
           <a:bodyPr wrap="square" lIns="0" tIns="0" rIns="0" bIns="0" rtlCol="0"/>
           <a:lstStyle/>
           <a:p>
-            <a:endParaRPr/>
+            <a:endParaRPr dirty="0"/>
           </a:p>
         </p:txBody>
       </p:sp>
@@ -1426,14 +1454,19 @@
             </a:pathLst>
           </a:custGeom>
           <a:solidFill>
-            <a:srgbClr val="CCB4A2"/>
+            <a:srgbClr val="CF7551"/>
           </a:solidFill>
+          <a:ln>
+            <a:solidFill>
+              <a:srgbClr val="B3B29C"/>
+            </a:solidFill>
+          </a:ln>
         </p:spPr>
         <p:txBody>
           <a:bodyPr wrap="square" lIns="0" tIns="0" rIns="0" bIns="0" rtlCol="0"/>
           <a:lstStyle/>
           <a:p>
-            <a:endParaRPr/>
+            <a:endParaRPr dirty="0"/>
           </a:p>
         </p:txBody>
       </p:sp>
@@ -1476,8 +1509,13 @@
             </a:pathLst>
           </a:custGeom>
           <a:solidFill>
-            <a:srgbClr val="CCB4A2"/>
+            <a:srgbClr val="CF7551"/>
           </a:solidFill>
+          <a:ln>
+            <a:solidFill>
+              <a:srgbClr val="B3B29C"/>
+            </a:solidFill>
+          </a:ln>
         </p:spPr>
         <p:txBody>
           <a:bodyPr wrap="square" lIns="0" tIns="0" rIns="0" bIns="0" rtlCol="0"/>
@@ -1487,28 +1525,6 @@
           </a:p>
         </p:txBody>
       </p:sp>
-      <p:pic>
-        <p:nvPicPr>
-          <p:cNvPr id="19" name="bg object 19"/>
-          <p:cNvPicPr/>
-          <p:nvPr/>
-        </p:nvPicPr>
-        <p:blipFill>
-          <a:blip r:embed="rId7" cstate="print"/>
-          <a:stretch>
-            <a:fillRect/>
-          </a:stretch>
-        </p:blipFill>
-        <p:spPr>
-          <a:xfrm>
-            <a:off x="160213" y="12212661"/>
-            <a:ext cx="13915816" cy="6063140"/>
-          </a:xfrm>
-          <a:prstGeom prst="rect">
-            <a:avLst/>
-          </a:prstGeom>
-        </p:spPr>
-      </p:pic>
       <p:sp>
         <p:nvSpPr>
           <p:cNvPr id="2" name="Holder 2"/>
@@ -1577,7 +1593,7 @@
             </a:lvl1pPr>
           </a:lstStyle>
           <a:p>
-            <a:endParaRPr/>
+            <a:endParaRPr dirty="0"/>
           </a:p>
         </p:txBody>
       </p:sp>
@@ -1878,60 +1894,6 @@
       </p:grpSpPr>
       <p:sp>
         <p:nvSpPr>
-          <p:cNvPr id="23" name="矩形 22">
-            <a:extLst>
-              <a:ext uri="{FF2B5EF4-FFF2-40B4-BE49-F238E27FC236}">
-                <a16:creationId xmlns:a16="http://schemas.microsoft.com/office/drawing/2014/main" id="{4F481E84-1EEC-925B-8FD1-CCB80032EA1A}"/>
-              </a:ext>
-            </a:extLst>
-          </p:cNvPr>
-          <p:cNvSpPr/>
-          <p:nvPr/>
-        </p:nvSpPr>
-        <p:spPr>
-          <a:xfrm>
-            <a:off x="0" y="12109450"/>
-            <a:ext cx="14185900" cy="6629400"/>
-          </a:xfrm>
-          <a:prstGeom prst="rect">
-            <a:avLst/>
-          </a:prstGeom>
-          <a:solidFill>
-            <a:srgbClr val="214556"/>
-          </a:solidFill>
-          <a:ln>
-            <a:solidFill>
-              <a:srgbClr val="214556"/>
-            </a:solidFill>
-          </a:ln>
-        </p:spPr>
-        <p:style>
-          <a:lnRef idx="2">
-            <a:schemeClr val="accent1">
-              <a:shade val="15000"/>
-            </a:schemeClr>
-          </a:lnRef>
-          <a:fillRef idx="1">
-            <a:schemeClr val="accent1"/>
-          </a:fillRef>
-          <a:effectRef idx="0">
-            <a:schemeClr val="accent1"/>
-          </a:effectRef>
-          <a:fontRef idx="minor">
-            <a:schemeClr val="lt1"/>
-          </a:fontRef>
-        </p:style>
-        <p:txBody>
-          <a:bodyPr rtlCol="0" anchor="ctr"/>
-          <a:lstStyle/>
-          <a:p>
-            <a:pPr algn="ctr"/>
-            <a:endParaRPr lang="zh-TW" altLang="en-US"/>
-          </a:p>
-        </p:txBody>
-      </p:sp>
-      <p:sp>
-        <p:nvSpPr>
           <p:cNvPr id="2" name="object 2"/>
           <p:cNvSpPr txBox="1">
             <a:spLocks noGrp="1"/>
@@ -1965,12 +1927,18 @@
             </a:pPr>
             <a:r>
               <a:rPr lang="zh-TW" altLang="en-US" sz="8800" spc="-5" dirty="0">
+                <a:solidFill>
+                  <a:srgbClr val="333333"/>
+                </a:solidFill>
                 <a:latin typeface="Yu Gothic" panose="020B0400000000000000" pitchFamily="34" charset="-128"/>
                 <a:ea typeface="Yu Gothic" panose="020B0400000000000000" pitchFamily="34" charset="-128"/>
               </a:rPr>
               <a:t>深度偽造音訊偵測系統</a:t>
             </a:r>
             <a:endParaRPr sz="8800" spc="-5" dirty="0">
+              <a:solidFill>
+                <a:srgbClr val="333333"/>
+              </a:solidFill>
               <a:latin typeface="Yu Gothic" panose="020B0400000000000000" pitchFamily="34" charset="-128"/>
               <a:ea typeface="Yu Gothic" panose="020B0400000000000000" pitchFamily="34" charset="-128"/>
             </a:endParaRPr>
@@ -1991,6 +1959,9 @@
           <a:prstGeom prst="rect">
             <a:avLst/>
           </a:prstGeom>
+          <a:solidFill>
+            <a:srgbClr val="D2C4B4"/>
+          </a:solidFill>
         </p:spPr>
         <p:txBody>
           <a:bodyPr vert="horz" wrap="square" lIns="0" tIns="13970" rIns="0" bIns="0" rtlCol="0">
@@ -2009,7 +1980,7 @@
             <a:r>
               <a:rPr lang="en-US" altLang="zh-TW" sz="4000" spc="-10" dirty="0">
                 <a:solidFill>
-                  <a:srgbClr val="E3DEC2"/>
+                  <a:srgbClr val="333333"/>
                 </a:solidFill>
                 <a:latin typeface="Microsoft JhengHei"/>
               </a:rPr>
@@ -2028,7 +1999,7 @@
             <a:r>
               <a:rPr sz="3400" spc="-10" dirty="0" err="1">
                 <a:solidFill>
-                  <a:srgbClr val="E3DEC2"/>
+                  <a:srgbClr val="333333"/>
                 </a:solidFill>
                 <a:latin typeface="Microsoft JhengHei"/>
                 <a:cs typeface="Microsoft JhengHei"/>
@@ -2038,7 +2009,7 @@
             <a:r>
               <a:rPr sz="3400" spc="-10" dirty="0">
                 <a:solidFill>
-                  <a:srgbClr val="E3DEC2"/>
+                  <a:srgbClr val="333333"/>
                 </a:solidFill>
                 <a:latin typeface="Microsoft JhengHei"/>
                 <a:cs typeface="Microsoft JhengHei"/>
@@ -2048,7 +2019,7 @@
             <a:r>
               <a:rPr lang="zh-TW" altLang="en-US" sz="3400" spc="-10" dirty="0">
                 <a:solidFill>
-                  <a:srgbClr val="E3DEC2"/>
+                  <a:srgbClr val="333333"/>
                 </a:solidFill>
                 <a:latin typeface="Microsoft JhengHei"/>
                 <a:cs typeface="Microsoft JhengHei"/>
@@ -2058,7 +2029,7 @@
             <a:r>
               <a:rPr lang="zh-TW" altLang="en-US" sz="3400" spc="-10" dirty="0">
                 <a:solidFill>
-                  <a:srgbClr val="E3DEC2"/>
+                  <a:srgbClr val="333333"/>
                 </a:solidFill>
                 <a:latin typeface="Microsoft JhengHei"/>
               </a:rPr>
@@ -2067,7 +2038,7 @@
             <a:r>
               <a:rPr sz="3400" dirty="0">
                 <a:solidFill>
-                  <a:srgbClr val="E3DEC2"/>
+                  <a:srgbClr val="333333"/>
                 </a:solidFill>
                 <a:latin typeface="Microsoft JhengHei"/>
                 <a:cs typeface="Microsoft JhengHei"/>
@@ -2077,7 +2048,7 @@
             <a:r>
               <a:rPr lang="en-US" sz="3400" dirty="0">
                 <a:solidFill>
-                  <a:srgbClr val="E3DEC2"/>
+                  <a:srgbClr val="333333"/>
                 </a:solidFill>
                 <a:latin typeface="Microsoft JhengHei"/>
                 <a:cs typeface="Microsoft JhengHei"/>
@@ -2087,7 +2058,7 @@
             <a:r>
               <a:rPr sz="3400" spc="-10" dirty="0" err="1">
                 <a:solidFill>
-                  <a:srgbClr val="E3DEC2"/>
+                  <a:srgbClr val="333333"/>
                 </a:solidFill>
                 <a:latin typeface="Microsoft JhengHei"/>
                 <a:cs typeface="Microsoft JhengHei"/>
@@ -2097,7 +2068,7 @@
             <a:r>
               <a:rPr sz="3400" spc="-50" dirty="0" err="1">
                 <a:solidFill>
-                  <a:srgbClr val="E3DEC2"/>
+                  <a:srgbClr val="333333"/>
                 </a:solidFill>
                 <a:latin typeface="Microsoft JhengHei"/>
                 <a:cs typeface="Microsoft JhengHei"/>
@@ -2105,6 +2076,9 @@
               <a:t>翰</a:t>
             </a:r>
             <a:endParaRPr sz="3400" dirty="0">
+              <a:solidFill>
+                <a:srgbClr val="333333"/>
+              </a:solidFill>
               <a:latin typeface="Microsoft JhengHei"/>
               <a:cs typeface="Microsoft JhengHei"/>
             </a:endParaRPr>
@@ -2146,7 +2120,7 @@
             <a:r>
               <a:rPr sz="3250" dirty="0">
                 <a:solidFill>
-                  <a:srgbClr val="E3DEC2"/>
+                  <a:srgbClr val="333333"/>
                 </a:solidFill>
                 <a:latin typeface="Microsoft JhengHei"/>
                 <a:cs typeface="Microsoft JhengHei"/>
@@ -2156,7 +2130,7 @@
             <a:r>
               <a:rPr sz="3250" spc="-50" dirty="0">
                 <a:solidFill>
-                  <a:srgbClr val="E3DEC2"/>
+                  <a:srgbClr val="333333"/>
                 </a:solidFill>
                 <a:latin typeface="Microsoft JhengHei"/>
                 <a:cs typeface="Microsoft JhengHei"/>
@@ -2166,7 +2140,7 @@
             <a:r>
               <a:rPr sz="3250" dirty="0">
                 <a:solidFill>
-                  <a:srgbClr val="E3DEC2"/>
+                  <a:srgbClr val="333333"/>
                 </a:solidFill>
                 <a:latin typeface="Microsoft JhengHei"/>
                 <a:cs typeface="Microsoft JhengHei"/>
@@ -2176,14 +2150,17 @@
             <a:r>
               <a:rPr sz="3250" spc="-50" dirty="0">
                 <a:solidFill>
-                  <a:srgbClr val="E3DEC2"/>
+                  <a:srgbClr val="333333"/>
                 </a:solidFill>
                 <a:latin typeface="Microsoft JhengHei"/>
                 <a:cs typeface="Microsoft JhengHei"/>
               </a:rPr>
               <a:t>系</a:t>
             </a:r>
-            <a:endParaRPr sz="3250">
+            <a:endParaRPr sz="3250" dirty="0">
+              <a:solidFill>
+                <a:srgbClr val="333333"/>
+              </a:solidFill>
               <a:latin typeface="Microsoft JhengHei"/>
               <a:cs typeface="Microsoft JhengHei"/>
             </a:endParaRPr>
@@ -2265,7 +2242,7 @@
             <a:r>
               <a:rPr sz="6000" b="1" spc="-15" dirty="0" err="1">
                 <a:solidFill>
-                  <a:srgbClr val="E3DEC2"/>
+                  <a:srgbClr val="333333"/>
                 </a:solidFill>
                 <a:latin typeface="Microsoft JhengHei"/>
                 <a:cs typeface="Microsoft JhengHei"/>
@@ -2273,6 +2250,9 @@
               <a:t>系統架構圖</a:t>
             </a:r>
             <a:endParaRPr sz="6000" b="1" dirty="0">
+              <a:solidFill>
+                <a:srgbClr val="333333"/>
+              </a:solidFill>
               <a:latin typeface="Microsoft JhengHei"/>
               <a:cs typeface="Microsoft JhengHei"/>
             </a:endParaRPr>
@@ -2672,6 +2652,43 @@
           </a:prstGeom>
         </p:spPr>
       </p:pic>
+      <p:pic>
+        <p:nvPicPr>
+          <p:cNvPr id="18" name="圖片 17">
+            <a:extLst>
+              <a:ext uri="{FF2B5EF4-FFF2-40B4-BE49-F238E27FC236}">
+                <a16:creationId xmlns:a16="http://schemas.microsoft.com/office/drawing/2014/main" id="{FF54D797-D706-14FE-8AD0-9F61843AB48D}"/>
+              </a:ext>
+            </a:extLst>
+          </p:cNvPr>
+          <p:cNvPicPr>
+            <a:picLocks noChangeAspect="1"/>
+          </p:cNvPicPr>
+          <p:nvPr/>
+        </p:nvPicPr>
+        <p:blipFill>
+          <a:blip r:embed="rId8">
+            <a:extLst>
+              <a:ext uri="{28A0092B-C50C-407E-A947-70E740481C1C}">
+                <a14:useLocalDpi xmlns:a14="http://schemas.microsoft.com/office/drawing/2010/main" val="0"/>
+              </a:ext>
+            </a:extLst>
+          </a:blip>
+          <a:srcRect l="8601" t="8624" r="8713" b="8227"/>
+          <a:stretch>
+            <a:fillRect/>
+          </a:stretch>
+        </p:blipFill>
+        <p:spPr>
+          <a:xfrm>
+            <a:off x="905666" y="17699642"/>
+            <a:ext cx="1378914" cy="1386635"/>
+          </a:xfrm>
+          <a:prstGeom prst="rect">
+            <a:avLst/>
+          </a:prstGeom>
+        </p:spPr>
+      </p:pic>
     </p:spTree>
   </p:cSld>
   <p:clrMapOvr>
@@ -2683,7 +2700,7 @@
 <file path=ppt/theme/theme1.xml><?xml version="1.0" encoding="utf-8"?>
 <a:theme xmlns:a="http://schemas.openxmlformats.org/drawingml/2006/main" name="Office Theme">
   <a:themeElements>
-    <a:clrScheme name="Office">
+    <a:clrScheme name="黃色">
       <a:dk1>
         <a:sysClr val="windowText" lastClr="000000"/>
       </a:dk1>
@@ -2691,34 +2708,34 @@
         <a:sysClr val="window" lastClr="FFFFFF"/>
       </a:lt1>
       <a:dk2>
-        <a:srgbClr val="1F497D"/>
+        <a:srgbClr val="39302A"/>
       </a:dk2>
       <a:lt2>
-        <a:srgbClr val="EEECE1"/>
+        <a:srgbClr val="E5DEDB"/>
       </a:lt2>
       <a:accent1>
-        <a:srgbClr val="4F81BD"/>
+        <a:srgbClr val="FFCA08"/>
       </a:accent1>
       <a:accent2>
-        <a:srgbClr val="C0504D"/>
+        <a:srgbClr val="F8931D"/>
       </a:accent2>
       <a:accent3>
-        <a:srgbClr val="9BBB59"/>
+        <a:srgbClr val="CE8D3E"/>
       </a:accent3>
       <a:accent4>
-        <a:srgbClr val="8064A2"/>
+        <a:srgbClr val="EC7016"/>
       </a:accent4>
       <a:accent5>
-        <a:srgbClr val="4BACC6"/>
+        <a:srgbClr val="E64823"/>
       </a:accent5>
       <a:accent6>
-        <a:srgbClr val="F79646"/>
+        <a:srgbClr val="9C6A6A"/>
       </a:accent6>
       <a:hlink>
-        <a:srgbClr val="0000FF"/>
+        <a:srgbClr val="2998E3"/>
       </a:hlink>
       <a:folHlink>
-        <a:srgbClr val="800080"/>
+        <a:srgbClr val="7F723D"/>
       </a:folHlink>
     </a:clrScheme>
     <a:fontScheme name="Office">
